--- a/SeriesTemporales/TrabajoGrupal/Presentación técnica - MIAAD.pptx
+++ b/SeriesTemporales/TrabajoGrupal/Presentación técnica - MIAAD.pptx
@@ -8195,10 +8195,10 @@
       </p:sp>
       <p:pic>
         <p:nvPicPr>
-          <p:cNvPr id="3" name="Imagen 2">
-            <a:extLst>
-              <a:ext uri="{FF2B5EF4-FFF2-40B4-BE49-F238E27FC236}">
-                <a16:creationId xmlns:a16="http://schemas.microsoft.com/office/drawing/2014/main" id="{A04046C9-2151-8A2F-FBC2-8A4DAD33660C}"/>
+          <p:cNvPr id="13" name="Imagen 12">
+            <a:extLst>
+              <a:ext uri="{FF2B5EF4-FFF2-40B4-BE49-F238E27FC236}">
+                <a16:creationId xmlns:a16="http://schemas.microsoft.com/office/drawing/2014/main" id="{1917BF4E-26D1-5055-1CC5-D98529105E7F}"/>
               </a:ext>
             </a:extLst>
           </p:cNvPr>
@@ -8209,36 +8209,6 @@
         </p:nvPicPr>
         <p:blipFill>
           <a:blip r:embed="rId3"/>
-          <a:stretch>
-            <a:fillRect/>
-          </a:stretch>
-        </p:blipFill>
-        <p:spPr>
-          <a:xfrm>
-            <a:off x="0" y="1862809"/>
-            <a:ext cx="12192000" cy="3423240"/>
-          </a:xfrm>
-          <a:prstGeom prst="rect">
-            <a:avLst/>
-          </a:prstGeom>
-        </p:spPr>
-      </p:pic>
-      <p:pic>
-        <p:nvPicPr>
-          <p:cNvPr id="13" name="Imagen 12">
-            <a:extLst>
-              <a:ext uri="{FF2B5EF4-FFF2-40B4-BE49-F238E27FC236}">
-                <a16:creationId xmlns:a16="http://schemas.microsoft.com/office/drawing/2014/main" id="{1917BF4E-26D1-5055-1CC5-D98529105E7F}"/>
-              </a:ext>
-            </a:extLst>
-          </p:cNvPr>
-          <p:cNvPicPr>
-            <a:picLocks noChangeAspect="1"/>
-          </p:cNvPicPr>
-          <p:nvPr/>
-        </p:nvPicPr>
-        <p:blipFill>
-          <a:blip r:embed="rId4"/>
           <a:srcRect l="778"/>
           <a:stretch/>
         </p:blipFill>
@@ -8252,6 +8222,36 @@
           </a:prstGeom>
         </p:spPr>
       </p:pic>
+      <p:pic>
+        <p:nvPicPr>
+          <p:cNvPr id="19" name="Imagen 18">
+            <a:extLst>
+              <a:ext uri="{FF2B5EF4-FFF2-40B4-BE49-F238E27FC236}">
+                <a16:creationId xmlns:a16="http://schemas.microsoft.com/office/drawing/2014/main" id="{976CA7DA-88F3-7E37-F385-36957118FE47}"/>
+              </a:ext>
+            </a:extLst>
+          </p:cNvPr>
+          <p:cNvPicPr>
+            <a:picLocks noChangeAspect="1"/>
+          </p:cNvPicPr>
+          <p:nvPr/>
+        </p:nvPicPr>
+        <p:blipFill>
+          <a:blip r:embed="rId4"/>
+          <a:stretch>
+            <a:fillRect/>
+          </a:stretch>
+        </p:blipFill>
+        <p:spPr>
+          <a:xfrm>
+            <a:off x="194730" y="1793332"/>
+            <a:ext cx="11936896" cy="3915382"/>
+          </a:xfrm>
+          <a:prstGeom prst="rect">
+            <a:avLst/>
+          </a:prstGeom>
+        </p:spPr>
+      </p:pic>
       <p:sp>
         <p:nvSpPr>
           <p:cNvPr id="14" name="Rectángulo 13">
@@ -8266,7 +8266,7 @@
         </p:nvSpPr>
         <p:spPr>
           <a:xfrm>
-            <a:off x="3648075" y="3305175"/>
+            <a:off x="3842039" y="3346578"/>
             <a:ext cx="219076" cy="923925"/>
           </a:xfrm>
           <a:prstGeom prst="rect">
@@ -8570,33 +8570,6 @@
                                       </p:cBhvr>
                                       <p:to>
                                         <p:strVal val="hidden"/>
-                                      </p:to>
-                                    </p:set>
-                                  </p:childTnLst>
-                                </p:cTn>
-                              </p:par>
-                              <p:par>
-                                <p:cTn id="21" presetID="1" presetClass="entr" presetSubtype="0" fill="hold" nodeType="withEffect">
-                                  <p:stCondLst>
-                                    <p:cond delay="0"/>
-                                  </p:stCondLst>
-                                  <p:childTnLst>
-                                    <p:set>
-                                      <p:cBhvr>
-                                        <p:cTn id="22" dur="1" fill="hold">
-                                          <p:stCondLst>
-                                            <p:cond delay="0"/>
-                                          </p:stCondLst>
-                                        </p:cTn>
-                                        <p:tgtEl>
-                                          <p:spTgt spid="3"/>
-                                        </p:tgtEl>
-                                        <p:attrNameLst>
-                                          <p:attrName>style.visibility</p:attrName>
-                                        </p:attrNameLst>
-                                      </p:cBhvr>
-                                      <p:to>
-                                        <p:strVal val="visible"/>
                                       </p:to>
                                     </p:set>
                                   </p:childTnLst>

--- a/SeriesTemporales/TrabajoGrupal/Presentación técnica - MIAAD.pptx
+++ b/SeriesTemporales/TrabajoGrupal/Presentación técnica - MIAAD.pptx
@@ -9539,10 +9539,10 @@
       </p:sp>
       <p:pic>
         <p:nvPicPr>
-          <p:cNvPr id="7" name="Imagen 6">
-            <a:extLst>
-              <a:ext uri="{FF2B5EF4-FFF2-40B4-BE49-F238E27FC236}">
-                <a16:creationId xmlns:a16="http://schemas.microsoft.com/office/drawing/2014/main" id="{795251B1-F475-2D74-21CC-D95BD1C43071}"/>
+          <p:cNvPr id="8" name="Imagen 7">
+            <a:extLst>
+              <a:ext uri="{FF2B5EF4-FFF2-40B4-BE49-F238E27FC236}">
+                <a16:creationId xmlns:a16="http://schemas.microsoft.com/office/drawing/2014/main" id="{9FED1051-6544-A51B-E9C8-674272553E09}"/>
               </a:ext>
             </a:extLst>
           </p:cNvPr>
@@ -9559,8 +9559,8 @@
         </p:blipFill>
         <p:spPr>
           <a:xfrm>
-            <a:off x="0" y="1687735"/>
-            <a:ext cx="12192000" cy="3482529"/>
+            <a:off x="234950" y="1393825"/>
+            <a:ext cx="11722100" cy="4070350"/>
           </a:xfrm>
           <a:prstGeom prst="rect">
             <a:avLst/>
